--- a/L3 2026 Agentic Platform Instructor Materials/slides/01 Agent architecture and the ReAct runtime.pptx
+++ b/L3 2026 Agentic Platform Instructor Materials/slides/01 Agent architecture and the ReAct runtime.pptx
@@ -2146,7 +2146,7 @@
           <a:lstStyle/>
           <a:p>
             <a:r>
-              <a:t>Create an empty folder such as ~/agentic-course, start your coding agent in it, and paste the lesson-00 prompt from the session page. It clones the public course repository as a read-only copy, creates your project from the kit's starter, installs everything, runs the first test, installs glab, signs you in to GitLab and pushes your project to a new private repository in the course group. Start your agent in the same folder every later session.</a:t>
+              <a:t>Create an empty folder such as ~/agentic-course, start your coding agent in it, and paste the lesson-00 prompt from the session page. It clones the public course repository as a read-only copy, creates your project from the kit's starter, installs everything, runs the first test, installs glab, signs you in to gitlab.ciklum.net (keeping any other GitLab sign-ins) and pushes your project to a new private repository in the course group there. Start your agent in the same folder every later session.</a:t>
             </a:r>
           </a:p>
         </p:txBody>
@@ -19659,7 +19659,7 @@
                 </a:solidFill>
                 <a:latin typeface="Zalando Sans Light"/>
               </a:rPr>
-              <a:t>1 passed · LESSON = 0 · your project in your GitLab group</a:t>
+              <a:t>1 passed · LESSON = 0 · your project on gitlab.ciklum.net</a:t>
             </a:r>
           </a:p>
         </p:txBody>

--- a/L3 2026 Agentic Platform Instructor Materials/slides/01 Agent architecture and the ReAct runtime.pptx
+++ b/L3 2026 Agentic Platform Instructor Materials/slides/01 Agent architecture and the ReAct runtime.pptx
@@ -1972,7 +1972,7 @@
           <a:lstStyle/>
           <a:p>
             <a:r>
-              <a:t>The model owns nothing. Tenant, run, role, permitted tools and limits are set by application code; model output is untrusted input that the runtime validates before acting on it. Events record what happened step by step; later the console shows them as a run timeline.</a:t>
+              <a:t>The platform sets who a run is for, what it may use and how far it may go. Until Session 08 the code that starts the run plays the platform: today the lab or a test; from Session 08, Platform.submit. The runtime, core.py, enforces the limits and validates model output, which is untrusted input, before acting on it. Events record what happened step by step; later the console shows them as a run timeline.</a:t>
             </a:r>
           </a:p>
         </p:txBody>
@@ -2204,7 +2204,7 @@
           <a:lstStyle/>
           <a:p>
             <a:r>
-              <a:t>core.py is the agent runtime: the core of every agent you will run. It holds the data the application owns, the shape of a model's reply and of a run, and the ReAct loop. From Session 08 the platform hosts it; a supervisor built from the same loop coordinates other agents from Session 06. The given files are data and a scripted mock model everyone shares. In production agents run in separate processes or sandboxes, apart from the platform's control plane; in this course they run in the platform's own process, a compromise that keeps everything runnable on a laptop.</a:t>
+              <a:t>core.py is the agent runtime: the core of every agent you will run. It holds the data the platform sets, the shape of a model's reply and of a run, and the ReAct loop. From Session 08 the platform hosts it; a supervisor built from the same loop coordinates other agents from Session 06. The given files are data and a scripted mock model everyone shares. In production agents run in separate processes or sandboxes, apart from the platform's control plane; in this course they run in the platform's own process, a compromise that keeps everything runnable on a laptop.</a:t>
             </a:r>
           </a:p>
         </p:txBody>
@@ -2262,7 +2262,7 @@
           <a:lstStyle/>
           <a:p>
             <a:r>
-              <a:t>Step 1 creates core.py with the data contracts only: Context, Limits, Reply and Run. Separate what the application owns from what the model produces. None of these fields come from the model. Ask: why not let the model's answer say which tools it may use? Because model output is untrusted; the application builds Context.</a:t>
+              <a:t>Step 1 creates core.py with the data contracts only: Context, Limits, Reply and Run. Separate what the platform sets from what the model produces. None of these fields come from the model. Ask: why not let the model's answer say which tools it may use? Because model output is untrusted; the platform builds Context.</a:t>
             </a:r>
           </a:p>
         </p:txBody>
@@ -16844,7 +16844,7 @@
           <a:lstStyle/>
           <a:p>
             <a:r>
-              <a:t>The application owns the limits</a:t>
+              <a:t>Platform, runtime, model</a:t>
             </a:r>
           </a:p>
         </p:txBody>
@@ -16905,7 +16905,7 @@
                           </a:solidFill>
                           <a:latin typeface="Zalando Sans Medium"/>
                         </a:rPr>
-                        <a:t>Owner</a:t>
+                        <a:t>Set by</a:t>
                       </a:r>
                     </a:p>
                   </a:txBody>
@@ -16973,7 +16973,7 @@
                           </a:solidFill>
                           <a:latin typeface="Zalando Sans Light"/>
                         </a:rPr>
-                        <a:t>application</a:t>
+                        <a:t>platform</a:t>
                       </a:r>
                     </a:p>
                   </a:txBody>
@@ -17041,7 +17041,7 @@
                           </a:solidFill>
                           <a:latin typeface="Zalando Sans Light"/>
                         </a:rPr>
-                        <a:t>application</a:t>
+                        <a:t>platform</a:t>
                       </a:r>
                     </a:p>
                   </a:txBody>
@@ -17109,7 +17109,7 @@
                           </a:solidFill>
                           <a:latin typeface="Zalando Sans Light"/>
                         </a:rPr>
-                        <a:t>application</a:t>
+                        <a:t>platform</a:t>
                       </a:r>
                     </a:p>
                   </a:txBody>
@@ -17131,7 +17131,7 @@
                           </a:solidFill>
                           <a:latin typeface="Zalando Sans Light"/>
                         </a:rPr>
-                        <a:t>Each limit catches a different failure; together they bound every run</a:t>
+                        <a:t>Each limit catches a different failure; the runtime enforces them</a:t>
                       </a:r>
                     </a:p>
                   </a:txBody>
@@ -17316,7 +17316,7 @@
                 </a:solidFill>
                 <a:latin typeface="Zalando Sans Medium"/>
               </a:rPr>
-              <a:t>The model owns nothing.</a:t>
+              <a:t>The platform sets. The runtime enforces. The model owns nothing.</a:t>
             </a:r>
           </a:p>
         </p:txBody>
@@ -20267,7 +20267,7 @@
                 </a:solidFill>
                 <a:latin typeface="Zalando Sans Light"/>
               </a:rPr>
-              <a:t>The data the application owns, the shape of a model's reply and of a run, and the ReAct loop. Every later session builds on it.</a:t>
+              <a:t>The data the platform sets, the shape of a model's reply and of a run, and the ReAct loop. Every later session builds on it.</a:t>
             </a:r>
           </a:p>
           <a:p>
@@ -24132,7 +24132,7 @@
                 </a:solidFill>
                 <a:latin typeface="Zalando Sans Light"/>
               </a:rPr>
-              <a:t>tenant, role and permitted tools are set by the application, never by model output.</a:t>
+              <a:t>tenant, role and permitted tools are set by the platform, never by model output.</a:t>
             </a:r>
           </a:p>
         </p:txBody>

--- a/L3 2026 Agentic Platform Instructor Materials/slides/01 Agent architecture and the ReAct runtime.pptx
+++ b/L3 2026 Agentic Platform Instructor Materials/slides/01 Agent architecture and the ReAct runtime.pptx
@@ -2204,7 +2204,7 @@
           <a:lstStyle/>
           <a:p>
             <a:r>
-              <a:t>agent_runtime/core.py is the agent runtime: the core of every agent you will run. It holds the data the platform sets, the shape of a model's reply and of a run, and the ReAct loop. From Session 08 the platform hosts it; a supervisor built from the same loop coordinates other agents from Session 06. The given files are data and a scripted mock model everyone shares. In production agents run in separate processes or sandboxes, apart from the platform's control plane; in this course they run in the platform's own process, a compromise that keeps everything runnable on a laptop.</a:t>
+              <a:t>core.py is the agent runtime: the core of every agent you will run. It holds the data the platform sets, the shape of a model's reply and of a run, and the ReAct loop. From Session 08 the platform hosts it; a supervisor built from the same loop coordinates other agents from Session 06. The given files are data and a scripted mock model everyone shares. In production agents run in separate processes or sandboxes, apart from the platform's control plane; in this course they run in the platform's own process, a compromise that keeps everything runnable on a laptop.</a:t>
             </a:r>
           </a:p>
         </p:txBody>
@@ -20041,7 +20041,7 @@
                 </a:solidFill>
                 <a:latin typeface="IBM Plex Mono"/>
               </a:rPr>
-              <a:t>  agent_runtime/    the agent runtime</a:t>
+              <a:t>  incident/</a:t>
             </a:r>
           </a:p>
           <a:p>
@@ -20056,11 +20056,11 @@
             <a:r>
               <a:rPr sz="1000">
                 <a:solidFill>
-                  <a:srgbClr val="00FFBE"/>
+                  <a:srgbClr val="E6ECF5"/>
                 </a:solidFill>
                 <a:latin typeface="IBM Plex Mono"/>
               </a:rPr>
-              <a:t>    core.py       you build: the runtime</a:t>
+              <a:t>    __init__.py   LESSON = 0, then 1</a:t>
             </a:r>
           </a:p>
           <a:p>
@@ -20075,11 +20075,11 @@
             <a:r>
               <a:rPr sz="1000">
                 <a:solidFill>
-                  <a:srgbClr val="00FFBE"/>
+                  <a:srgbClr val="E6ECF5"/>
                 </a:solidFill>
                 <a:latin typeface="IBM Plex Mono"/>
               </a:rPr>
-              <a:t>    providers.py  you build; mock is given</a:t>
+              <a:t>    lab.py        runs a session's demo</a:t>
             </a:r>
           </a:p>
           <a:p>
@@ -20094,11 +20094,11 @@
             <a:r>
               <a:rPr sz="1000">
                 <a:solidFill>
-                  <a:srgbClr val="E6ECF5"/>
+                  <a:srgbClr val="00FFBE"/>
                 </a:solidFill>
                 <a:latin typeface="IBM Plex Mono"/>
               </a:rPr>
-              <a:t>  course/           course scaffolding</a:t>
+              <a:t>    core.py       you build: the runtime</a:t>
             </a:r>
           </a:p>
           <a:p>
@@ -20113,11 +20113,11 @@
             <a:r>
               <a:rPr sz="1000">
                 <a:solidFill>
-                  <a:srgbClr val="E6ECF5"/>
+                  <a:srgbClr val="00FFBE"/>
                 </a:solidFill>
                 <a:latin typeface="IBM Plex Mono"/>
               </a:rPr>
-              <a:t>    __init__.py   LESSON = 0, then 1</a:t>
+              <a:t>    providers.py  you build; mock is given</a:t>
             </a:r>
           </a:p>
           <a:p>
@@ -20136,7 +20136,7 @@
                 </a:solidFill>
                 <a:latin typeface="IBM Plex Mono"/>
               </a:rPr>
-              <a:t>    lab.py        runs a session's demo</a:t>
+              <a:t>    fixtures.py   given: synthetic data</a:t>
             </a:r>
           </a:p>
           <a:p>
@@ -20155,7 +20155,7 @@
                 </a:solidFill>
                 <a:latin typeface="IBM Plex Mono"/>
               </a:rPr>
-              <a:t>    fixtures.py   given: synthetic data</a:t>
+              <a:t>    labs/l01.py   check pack: the demo</a:t>
             </a:r>
           </a:p>
           <a:p>
@@ -20174,7 +20174,7 @@
                 </a:solidFill>
                 <a:latin typeface="IBM Plex Mono"/>
               </a:rPr>
-              <a:t>    labs/l01.py   check pack: the demo</a:t>
+              <a:t>  tests/</a:t>
             </a:r>
           </a:p>
           <a:p>
@@ -20193,7 +20193,7 @@
                 </a:solidFill>
                 <a:latin typeface="IBM Plex Mono"/>
               </a:rPr>
-              <a:t>  tests/</a:t>
+              <a:t>    test_setup.py</a:t>
             </a:r>
           </a:p>
           <a:p>
@@ -20212,45 +20212,7 @@
                 </a:solidFill>
                 <a:latin typeface="IBM Plex Mono"/>
               </a:rPr>
-              <a:t>    test_setup.py</a:t>
-            </a:r>
-          </a:p>
-          <a:p>
-            <a:pPr algn="l">
-              <a:lnSpc>
-                <a:spcPct val="100000"/>
-              </a:lnSpc>
-              <a:spcAft>
-                <a:spcPts val="0"/>
-              </a:spcAft>
-            </a:pPr>
-            <a:r>
-              <a:rPr sz="1000">
-                <a:solidFill>
-                  <a:srgbClr val="E6ECF5"/>
-                </a:solidFill>
-                <a:latin typeface="IBM Plex Mono"/>
-              </a:rPr>
               <a:t>    test_lesson01.py  check pack</a:t>
-            </a:r>
-          </a:p>
-          <a:p>
-            <a:pPr algn="l">
-              <a:lnSpc>
-                <a:spcPct val="100000"/>
-              </a:lnSpc>
-              <a:spcAft>
-                <a:spcPts val="0"/>
-              </a:spcAft>
-            </a:pPr>
-            <a:r>
-              <a:rPr sz="1000">
-                <a:solidFill>
-                  <a:srgbClr val="E6ECF5"/>
-                </a:solidFill>
-                <a:latin typeface="IBM Plex Mono"/>
-              </a:rPr>
-              <a:t>  agentic_platform/ arrives in Session 02</a:t>
             </a:r>
           </a:p>
         </p:txBody>

--- a/L3 2026 Agentic Platform Instructor Materials/slides/01 Agent architecture and the ReAct runtime.pptx
+++ b/L3 2026 Agentic Platform Instructor Materials/slides/01 Agent architecture and the ReAct runtime.pptx
@@ -8237,7 +8237,7 @@
           <a:lstStyle/>
           <a:p>
             <a:r>
-              <a:t>Innovate · L3 · Session 01 of 12 · 28 October 2026</a:t>
+              <a:t>Innovate · L3 · Session 01 of 12 · 21 October 2026</a:t>
             </a:r>
           </a:p>
         </p:txBody>
